--- a/raport/NurFlac_Prezentare.pptx
+++ b/raport/NurFlac_Prezentare.pptx
@@ -6285,18 +6285,40 @@
                   <a:srgbClr val="EAEAEA"/>
                 </a:solidFill>
               </a:rPr>
-              <a:t>HelpCommand verifică IsAdmin() şi afişează</a:t>
-            </a:r>
-          </a:p>
-          <a:p>
-            <a:pPr algn="l"/>
-            <a:r>
-              <a:rPr sz="1200">
-                <a:solidFill>
-                  <a:srgbClr val="EAEAEA"/>
-                </a:solidFill>
-              </a:rPr>
-              <a:t>secțiunea admin doar administratorilor.</a:t>
+              <a:t>Comenzi admin: /ban, /timeout, /unban,</a:t>
+            </a:r>
+          </a:p>
+          <a:p>
+            <a:pPr algn="l"/>
+            <a:r>
+              <a:rPr sz="1200">
+                <a:solidFill>
+                  <a:srgbClr val="EAEAEA"/>
+                </a:solidFill>
+              </a:rPr>
+              <a:t>/resetuser, /clearusers, /clearledger.</a:t>
+            </a:r>
+          </a:p>
+          <a:p>
+            <a:pPr algn="l"/>
+            <a:r>
+              <a:rPr sz="1200">
+                <a:solidFill>
+                  <a:srgbClr val="EAEAEA"/>
+                </a:solidFill>
+              </a:rPr>
+              <a:t>HelpCommand afişează secțiunea admin</a:t>
+            </a:r>
+          </a:p>
+          <a:p>
+            <a:pPr algn="l"/>
+            <a:r>
+              <a:rPr sz="1200">
+                <a:solidFill>
+                  <a:srgbClr val="EAEAEA"/>
+                </a:solidFill>
+              </a:rPr>
+              <a:t>doar administratorilor (IsAdmin()).</a:t>
             </a:r>
           </a:p>
         </p:txBody>
@@ -7563,7 +7585,7 @@
                   <a:srgbClr val="A0A8B8"/>
                 </a:solidFill>
               </a:rPr>
-              <a:t>Sesiune /album-upload cu mai multe fişiere → raport final  ·  Comenzi admin: /ban, /timeout, /unban</a:t>
+              <a:t>Sesiune /album-upload cu mai multe fişiere → raport final  ·  Comenzi admin: /ban, /timeout, /unban, /resetuser, /clearusers, /clearledger</a:t>
             </a:r>
           </a:p>
         </p:txBody>
